--- a/GiuaKi/1150080068_TranMinhNhat_BaoCaoKiemThuGiuaKi.pptx
+++ b/GiuaKi/1150080068_TranMinhNhat_BaoCaoKiemThuGiuaKi.pptx
@@ -2590,7 +2590,7 @@
               <a:buNone/>
             </a:pPr>
             <a:r>
-              <a:rPr lang="en-US" sz="1250" b="1" dirty="0">
+              <a:rPr lang="en-US" sz="1600" b="1" dirty="0">
                 <a:solidFill>
                   <a:srgbClr val="FFFFFF"/>
                 </a:solidFill>
@@ -2600,7 +2600,7 @@
               </a:rPr>
               <a:t>Bài học kinh nghiệm</a:t>
             </a:r>
-            <a:endParaRPr lang="en-US" sz="1250" dirty="0"/>
+            <a:endParaRPr lang="en-US" sz="1600" dirty="0"/>
           </a:p>
         </p:txBody>
       </p:sp>
@@ -2654,7 +2654,7 @@
               <a:buNone/>
             </a:pPr>
             <a:r>
-              <a:rPr lang="en-US" sz="1150" b="1" dirty="0">
+              <a:rPr lang="en-US" sz="1400" b="1" dirty="0">
                 <a:solidFill>
                   <a:srgbClr val="1E293B"/>
                 </a:solidFill>
@@ -2664,7 +2664,7 @@
               </a:rPr>
               <a:t>BB + WB bổ trợ nhau</a:t>
             </a:r>
-            <a:endParaRPr lang="en-US" sz="1150" dirty="0"/>
+            <a:endParaRPr lang="en-US" sz="1400" dirty="0"/>
           </a:p>
         </p:txBody>
       </p:sp>
@@ -2693,7 +2693,7 @@
               <a:buNone/>
             </a:pPr>
             <a:r>
-              <a:rPr lang="en-US" sz="950" dirty="0">
+              <a:rPr lang="en-US" sz="1050" dirty="0">
                 <a:solidFill>
                   <a:srgbClr val="475569"/>
                 </a:solidFill>
@@ -2703,7 +2703,7 @@
               </a:rPr>
               <a:t>BB phát hiện triệu chứng từ bên ngoài. WB tìm nguyên nhân gốc rễ trong code. Cần cả hai để đánh giá toàn diện — riêng lẻ không đủ</a:t>
             </a:r>
-            <a:endParaRPr lang="en-US" sz="950" dirty="0"/>
+            <a:endParaRPr lang="en-US" sz="1050" dirty="0"/>
           </a:p>
         </p:txBody>
       </p:sp>
@@ -2757,7 +2757,7 @@
               <a:buNone/>
             </a:pPr>
             <a:r>
-              <a:rPr lang="en-US" sz="1150" b="1" dirty="0">
+              <a:rPr lang="en-US" sz="1400" b="1" dirty="0">
                 <a:solidFill>
                   <a:srgbClr val="1E293B"/>
                 </a:solidFill>
@@ -2767,7 +2767,7 @@
               </a:rPr>
               <a:t>Sinon stub = không cần Docker</a:t>
             </a:r>
-            <a:endParaRPr lang="en-US" sz="1150" dirty="0"/>
+            <a:endParaRPr lang="en-US" sz="1400" dirty="0"/>
           </a:p>
         </p:txBody>
       </p:sp>
@@ -2796,7 +2796,7 @@
               <a:buNone/>
             </a:pPr>
             <a:r>
-              <a:rPr lang="en-US" sz="950" dirty="0">
+              <a:rPr lang="en-US" sz="1050" dirty="0">
                 <a:solidFill>
                   <a:srgbClr val="475569"/>
                 </a:solidFill>
@@ -2806,7 +2806,7 @@
               </a:rPr>
               <a:t>63 WB test chạy trong ~8 giây, cô lập hoàn toàn khỏi DB thật. Test ổn định, không phụ thuộc môi trường Docker</a:t>
             </a:r>
-            <a:endParaRPr lang="en-US" sz="950" dirty="0"/>
+            <a:endParaRPr lang="en-US" sz="1050" dirty="0"/>
           </a:p>
         </p:txBody>
       </p:sp>
@@ -2860,7 +2860,7 @@
               <a:buNone/>
             </a:pPr>
             <a:r>
-              <a:rPr lang="en-US" sz="1150" b="1" dirty="0">
+              <a:rPr lang="en-US" sz="1400" b="1" dirty="0">
                 <a:solidFill>
                   <a:srgbClr val="1E293B"/>
                 </a:solidFill>
@@ -2870,7 +2870,7 @@
               </a:rPr>
               <a:t>ZAP là bằng chứng trực quan</a:t>
             </a:r>
-            <a:endParaRPr lang="en-US" sz="1150" dirty="0"/>
+            <a:endParaRPr lang="en-US" sz="1400" dirty="0"/>
           </a:p>
         </p:txBody>
       </p:sp>
@@ -2899,7 +2899,7 @@
               <a:buNone/>
             </a:pPr>
             <a:r>
-              <a:rPr lang="en-US" sz="950" dirty="0">
+              <a:rPr lang="en-US" sz="1050" dirty="0">
                 <a:solidFill>
                   <a:srgbClr val="475569"/>
                 </a:solidFill>
@@ -2907,9 +2907,42 @@
                 <a:ea typeface="Calibri" pitchFamily="34" charset="-122"/>
                 <a:cs typeface="Calibri" pitchFamily="34" charset="-120"/>
               </a:rPr>
-              <a:t>History/Request/Response từ ZAP tái hiện được, thuyết phục hơn ảnh chụp màn hình — dễ trình bày cho giảng viên</a:t>
-            </a:r>
-            <a:endParaRPr lang="en-US" sz="950" dirty="0"/>
+              <a:t>History/Request/Response từ ZAP tái hiện được, thuyết phục hơn ảnh chụp </a:t>
+            </a:r>
+            <a:r>
+              <a:rPr lang="en-US" sz="1050" dirty="0" err="1">
+                <a:solidFill>
+                  <a:srgbClr val="475569"/>
+                </a:solidFill>
+                <a:latin typeface="Calibri" pitchFamily="34" charset="0"/>
+                <a:ea typeface="Calibri" pitchFamily="34" charset="-122"/>
+                <a:cs typeface="Calibri" pitchFamily="34" charset="-120"/>
+              </a:rPr>
+              <a:t>màn</a:t>
+            </a:r>
+            <a:r>
+              <a:rPr lang="en-US" sz="1050" dirty="0">
+                <a:solidFill>
+                  <a:srgbClr val="475569"/>
+                </a:solidFill>
+                <a:latin typeface="Calibri" pitchFamily="34" charset="0"/>
+                <a:ea typeface="Calibri" pitchFamily="34" charset="-122"/>
+                <a:cs typeface="Calibri" pitchFamily="34" charset="-120"/>
+              </a:rPr>
+              <a:t> </a:t>
+            </a:r>
+            <a:r>
+              <a:rPr lang="en-US" sz="1050" dirty="0" err="1">
+                <a:solidFill>
+                  <a:srgbClr val="475569"/>
+                </a:solidFill>
+                <a:latin typeface="Calibri" pitchFamily="34" charset="0"/>
+                <a:ea typeface="Calibri" pitchFamily="34" charset="-122"/>
+                <a:cs typeface="Calibri" pitchFamily="34" charset="-120"/>
+              </a:rPr>
+              <a:t>hình</a:t>
+            </a:r>
+            <a:endParaRPr lang="en-US" sz="1050" dirty="0"/>
           </a:p>
         </p:txBody>
       </p:sp>
@@ -2963,7 +2996,7 @@
               <a:buNone/>
             </a:pPr>
             <a:r>
-              <a:rPr lang="en-US" sz="1150" b="1" dirty="0">
+              <a:rPr lang="en-US" sz="1400" b="1" dirty="0">
                 <a:solidFill>
                   <a:srgbClr val="1E293B"/>
                 </a:solidFill>
@@ -2973,7 +3006,7 @@
               </a:rPr>
               <a:t>Juice Shop có chủ đích</a:t>
             </a:r>
-            <a:endParaRPr lang="en-US" sz="1150" dirty="0"/>
+            <a:endParaRPr lang="en-US" sz="1400" dirty="0"/>
           </a:p>
         </p:txBody>
       </p:sp>
@@ -3002,7 +3035,7 @@
               <a:buNone/>
             </a:pPr>
             <a:r>
-              <a:rPr lang="en-US" sz="950" dirty="0">
+              <a:rPr lang="en-US" sz="1050" dirty="0">
                 <a:solidFill>
                   <a:srgbClr val="475569"/>
                 </a:solidFill>
@@ -3010,9 +3043,9 @@
                 <a:ea typeface="Calibri" pitchFamily="34" charset="-122"/>
                 <a:cs typeface="Calibri" pitchFamily="34" charset="-120"/>
               </a:rPr>
-              <a:t>Phân biệt rõ: Fail do test design sai vs lỗi thật của app vs lỗi có chủ đích của Juice Shop — quan trọng khi giải thích kết quả</a:t>
-            </a:r>
-            <a:endParaRPr lang="en-US" sz="950" dirty="0"/>
+              <a:t>Phân biệt rõ: Fail do test design sai vs lỗi thật của app vs lỗi có chủ đích của Juice Shop</a:t>
+            </a:r>
+            <a:endParaRPr lang="en-US" sz="1050" dirty="0"/>
           </a:p>
         </p:txBody>
       </p:sp>
@@ -3098,7 +3131,7 @@
               <a:buNone/>
             </a:pPr>
             <a:r>
-              <a:rPr lang="en-US" sz="1250" b="1" dirty="0">
+              <a:rPr lang="en-US" sz="1600" b="1" dirty="0">
                 <a:solidFill>
                   <a:srgbClr val="FFFFFF"/>
                 </a:solidFill>
@@ -3108,7 +3141,7 @@
               </a:rPr>
               <a:t>Đề xuất cải tiến ứng dụng</a:t>
             </a:r>
-            <a:endParaRPr lang="en-US" sz="1250" dirty="0"/>
+            <a:endParaRPr lang="en-US" sz="1600" dirty="0"/>
           </a:p>
         </p:txBody>
       </p:sp>
@@ -3162,7 +3195,7 @@
               <a:buNone/>
             </a:pPr>
             <a:r>
-              <a:rPr lang="en-US" sz="1150" b="1" dirty="0">
+              <a:rPr lang="en-US" sz="1400" b="1" dirty="0">
                 <a:solidFill>
                   <a:srgbClr val="1E293B"/>
                 </a:solidFill>
@@ -3172,7 +3205,7 @@
               </a:rPr>
               <a:t>Enforce Password Policy</a:t>
             </a:r>
-            <a:endParaRPr lang="en-US" sz="1150" dirty="0"/>
+            <a:endParaRPr lang="en-US" sz="1400" dirty="0"/>
           </a:p>
         </p:txBody>
       </p:sp>
@@ -3201,7 +3234,7 @@
               <a:buNone/>
             </a:pPr>
             <a:r>
-              <a:rPr lang="en-US" sz="950" dirty="0">
+              <a:rPr lang="en-US" sz="1050" dirty="0">
                 <a:solidFill>
                   <a:srgbClr val="475569"/>
                 </a:solidFill>
@@ -3211,7 +3244,7 @@
               </a:rPr>
               <a:t>bcrypt/argon2 có salt · min 8 ký tự · complexity check · blacklist mật khẩu phổ biến</a:t>
             </a:r>
-            <a:endParaRPr lang="en-US" sz="950" dirty="0"/>
+            <a:endParaRPr lang="en-US" sz="1050" dirty="0"/>
           </a:p>
         </p:txBody>
       </p:sp>
@@ -3265,7 +3298,7 @@
               <a:buNone/>
             </a:pPr>
             <a:r>
-              <a:rPr lang="en-US" sz="1150" b="1" dirty="0">
+              <a:rPr lang="en-US" sz="1400" b="1" dirty="0">
                 <a:solidFill>
                   <a:srgbClr val="1E293B"/>
                 </a:solidFill>
@@ -3275,7 +3308,7 @@
               </a:rPr>
               <a:t>Thêm Account Lockout</a:t>
             </a:r>
-            <a:endParaRPr lang="en-US" sz="1150" dirty="0"/>
+            <a:endParaRPr lang="en-US" sz="1400" dirty="0"/>
           </a:p>
         </p:txBody>
       </p:sp>
@@ -3304,7 +3337,7 @@
               <a:buNone/>
             </a:pPr>
             <a:r>
-              <a:rPr lang="en-US" sz="950" dirty="0">
+              <a:rPr lang="en-US" sz="1050" dirty="0">
                 <a:solidFill>
                   <a:srgbClr val="475569"/>
                 </a:solidFill>
@@ -3314,7 +3347,7 @@
               </a:rPr>
               <a:t>Khóa 15 phút sau 5 lần sai · CAPTCHA sau 3 lần · rate limit HTTP 429</a:t>
             </a:r>
-            <a:endParaRPr lang="en-US" sz="950" dirty="0"/>
+            <a:endParaRPr lang="en-US" sz="1050" dirty="0"/>
           </a:p>
         </p:txBody>
       </p:sp>
@@ -3368,7 +3401,7 @@
               <a:buNone/>
             </a:pPr>
             <a:r>
-              <a:rPr lang="en-US" sz="1150" b="1" dirty="0">
+              <a:rPr lang="en-US" sz="1400" b="1" dirty="0">
                 <a:solidFill>
                   <a:srgbClr val="1E293B"/>
                 </a:solidFill>
@@ -3378,7 +3411,7 @@
               </a:rPr>
               <a:t>Sửa JWT – thêm exp</a:t>
             </a:r>
-            <a:endParaRPr lang="en-US" sz="1150" dirty="0"/>
+            <a:endParaRPr lang="en-US" sz="1400" dirty="0"/>
           </a:p>
         </p:txBody>
       </p:sp>
@@ -3407,7 +3440,7 @@
               <a:buNone/>
             </a:pPr>
             <a:r>
-              <a:rPr lang="en-US" sz="950" dirty="0">
+              <a:rPr lang="en-US" sz="1050" dirty="0">
                 <a:solidFill>
                   <a:srgbClr val="475569"/>
                 </a:solidFill>
@@ -3417,7 +3450,7 @@
               </a:rPr>
               <a:t>Nâng jsonwebtoken v9+ · expiresIn:'1h' · blacklist token khi logout</a:t>
             </a:r>
-            <a:endParaRPr lang="en-US" sz="950" dirty="0"/>
+            <a:endParaRPr lang="en-US" sz="1050" dirty="0"/>
           </a:p>
         </p:txBody>
       </p:sp>
@@ -3471,7 +3504,7 @@
               <a:buNone/>
             </a:pPr>
             <a:r>
-              <a:rPr lang="en-US" sz="1150" b="1" dirty="0">
+              <a:rPr lang="en-US" sz="1400" b="1" dirty="0">
                 <a:solidFill>
                   <a:srgbClr val="1E293B"/>
                 </a:solidFill>
@@ -3481,7 +3514,7 @@
               </a:rPr>
               <a:t>Bảo vệ khóa mã hóa</a:t>
             </a:r>
-            <a:endParaRPr lang="en-US" sz="1150" dirty="0"/>
+            <a:endParaRPr lang="en-US" sz="1400" dirty="0"/>
           </a:p>
         </p:txBody>
       </p:sp>
@@ -3510,7 +3543,7 @@
               <a:buNone/>
             </a:pPr>
             <a:r>
-              <a:rPr lang="en-US" sz="950" dirty="0">
+              <a:rPr lang="en-US" sz="1050" dirty="0">
                 <a:solidFill>
                   <a:srgbClr val="475569"/>
                 </a:solidFill>
@@ -3520,7 +3553,7 @@
               </a:rPr>
               <a:t>Private key vào env var/secret manager · dùng bcrypt hoặc PBKDF2 thay MD5</a:t>
             </a:r>
-            <a:endParaRPr lang="en-US" sz="950" dirty="0"/>
+            <a:endParaRPr lang="en-US" sz="1050" dirty="0"/>
           </a:p>
         </p:txBody>
       </p:sp>
@@ -3574,7 +3607,7 @@
               <a:buNone/>
             </a:pPr>
             <a:r>
-              <a:rPr lang="en-US" sz="1150" b="1" dirty="0">
+              <a:rPr lang="en-US" sz="1400" b="1" dirty="0">
                 <a:solidFill>
                   <a:srgbClr val="1E293B"/>
                 </a:solidFill>
@@ -3584,7 +3617,7 @@
               </a:rPr>
               <a:t>Cookie attributes đầy đủ</a:t>
             </a:r>
-            <a:endParaRPr lang="en-US" sz="1150" dirty="0"/>
+            <a:endParaRPr lang="en-US" sz="1400" dirty="0"/>
           </a:p>
         </p:txBody>
       </p:sp>
@@ -3613,7 +3646,7 @@
               <a:buNone/>
             </a:pPr>
             <a:r>
-              <a:rPr lang="en-US" sz="950" dirty="0">
+              <a:rPr lang="en-US" sz="1050" dirty="0">
                 <a:solidFill>
                   <a:srgbClr val="475569"/>
                 </a:solidFill>
@@ -3623,7 +3656,7 @@
               </a:rPr>
               <a:t>Set HttpOnly, Secure, SameSite=Strict cho toàn bộ cookie session</a:t>
             </a:r>
-            <a:endParaRPr lang="en-US" sz="950" dirty="0"/>
+            <a:endParaRPr lang="en-US" sz="1050" dirty="0"/>
           </a:p>
         </p:txBody>
       </p:sp>
